--- a/media/exports/reports/2026-01/growth-trades.pptx
+++ b/media/exports/reports/2026-01/growth-trades.pptx
@@ -222,52 +222,52 @@
                 <c:formatCode>$#,##0;[Red]($#,##0);"-"</c:formatCode>
                 <c:ptCount val="16"/>
                 <c:pt idx="0">
-                  <c:v>171009</c:v>
+                  <c:v>191014</c:v>
                 </c:pt>
                 <c:pt idx="1">
-                  <c:v>179474</c:v>
+                  <c:v>200124</c:v>
                 </c:pt>
                 <c:pt idx="2">
-                  <c:v>143156</c:v>
+                  <c:v>159406</c:v>
                 </c:pt>
                 <c:pt idx="3">
-                  <c:v>140909</c:v>
+                  <c:v>156794</c:v>
                 </c:pt>
                 <c:pt idx="4">
-                  <c:v>160943</c:v>
+                  <c:v>179190</c:v>
                 </c:pt>
                 <c:pt idx="5">
-                  <c:v>135082</c:v>
+                  <c:v>150465</c:v>
                 </c:pt>
                 <c:pt idx="6">
-                  <c:v>124705</c:v>
+                  <c:v>138865</c:v>
                 </c:pt>
                 <c:pt idx="7">
-                  <c:v>129816</c:v>
+                  <c:v>144649</c:v>
                 </c:pt>
                 <c:pt idx="8">
-                  <c:v>164113</c:v>
+                  <c:v>183265</c:v>
                 </c:pt>
                 <c:pt idx="9">
-                  <c:v>186760</c:v>
+                  <c:v>208588</c:v>
                 </c:pt>
                 <c:pt idx="10">
-                  <c:v>139164</c:v>
+                  <c:v>155118</c:v>
                 </c:pt>
                 <c:pt idx="11">
-                  <c:v>128255</c:v>
+                  <c:v>143077</c:v>
                 </c:pt>
                 <c:pt idx="12">
-                  <c:v>128898</c:v>
+                  <c:v>143566</c:v>
                 </c:pt>
                 <c:pt idx="13">
-                  <c:v>174786</c:v>
+                  <c:v>194966</c:v>
                 </c:pt>
                 <c:pt idx="14">
-                  <c:v>135079</c:v>
+                  <c:v>150283</c:v>
                 </c:pt>
                 <c:pt idx="15">
-                  <c:v>164780</c:v>
+                  <c:v>183306</c:v>
                 </c:pt>
               </c:numCache>
             </c:numRef>
@@ -316,7 +316,7 @@
         <c:axId val="-2100718248"/>
         <c:scaling>
           <c:orientation val="minMax"/>
-          <c:max val="200000.0"/>
+          <c:max val="250000.0"/>
           <c:min val="0.0"/>
         </c:scaling>
         <c:delete val="0"/>
@@ -486,52 +486,52 @@
                 <c:formatCode>$#,##0;[Red]($#,##0);"-"</c:formatCode>
                 <c:ptCount val="16"/>
                 <c:pt idx="0">
-                  <c:v>24670</c:v>
+                  <c:v>27650</c:v>
                 </c:pt>
                 <c:pt idx="1">
-                  <c:v>24670</c:v>
+                  <c:v>27650</c:v>
                 </c:pt>
                 <c:pt idx="2">
-                  <c:v>24670</c:v>
+                  <c:v>27650</c:v>
                 </c:pt>
                 <c:pt idx="3">
-                  <c:v>24670</c:v>
+                  <c:v>27650</c:v>
                 </c:pt>
                 <c:pt idx="4">
-                  <c:v>27930</c:v>
+                  <c:v>31300</c:v>
                 </c:pt>
                 <c:pt idx="5">
-                  <c:v>27930</c:v>
+                  <c:v>31300</c:v>
                 </c:pt>
                 <c:pt idx="6">
-                  <c:v>27930</c:v>
+                  <c:v>31300</c:v>
                 </c:pt>
                 <c:pt idx="7">
-                  <c:v>27930</c:v>
+                  <c:v>31300</c:v>
                 </c:pt>
                 <c:pt idx="8">
-                  <c:v>31870</c:v>
+                  <c:v>35720</c:v>
                 </c:pt>
                 <c:pt idx="9">
-                  <c:v>33200</c:v>
+                  <c:v>37200</c:v>
                 </c:pt>
                 <c:pt idx="10">
-                  <c:v>33200</c:v>
+                  <c:v>37200</c:v>
                 </c:pt>
                 <c:pt idx="11">
-                  <c:v>33200</c:v>
+                  <c:v>37200</c:v>
                 </c:pt>
                 <c:pt idx="12">
-                  <c:v>35800</c:v>
+                  <c:v>40100</c:v>
                 </c:pt>
                 <c:pt idx="13">
-                  <c:v>35800</c:v>
+                  <c:v>40100</c:v>
                 </c:pt>
                 <c:pt idx="14">
-                  <c:v>35800</c:v>
+                  <c:v>40100</c:v>
                 </c:pt>
                 <c:pt idx="15">
-                  <c:v>35800</c:v>
+                  <c:v>40100</c:v>
                 </c:pt>
               </c:numCache>
             </c:numRef>
@@ -580,7 +580,7 @@
         <c:axId val="-2100718248"/>
         <c:scaling>
           <c:orientation val="minMax"/>
-          <c:max val="40000.0"/>
+          <c:max val="50000.0"/>
           <c:min val="0.0"/>
         </c:scaling>
         <c:delete val="0"/>
@@ -750,52 +750,52 @@
                 <c:formatCode>$#,##0;[Red]($#,##0);"-"</c:formatCode>
                 <c:ptCount val="16"/>
                 <c:pt idx="0">
+                  <c:v>141600</c:v>
+                </c:pt>
+                <c:pt idx="1">
+                  <c:v>147100</c:v>
+                </c:pt>
+                <c:pt idx="2">
+                  <c:v>103700</c:v>
+                </c:pt>
+                <c:pt idx="3">
+                  <c:v>100100</c:v>
+                </c:pt>
+                <c:pt idx="4">
+                  <c:v>118600</c:v>
+                </c:pt>
+                <c:pt idx="5">
+                  <c:v>96400</c:v>
+                </c:pt>
+                <c:pt idx="6">
+                  <c:v>83900</c:v>
+                </c:pt>
+                <c:pt idx="7">
+                  <c:v>89900</c:v>
+                </c:pt>
+                <c:pt idx="8">
                   <c:v>126300</c:v>
                 </c:pt>
-                <c:pt idx="1">
-                  <c:v>131400</c:v>
-                </c:pt>
-                <c:pt idx="2">
-                  <c:v>92600</c:v>
-                </c:pt>
-                <c:pt idx="3">
-                  <c:v>89400</c:v>
-                </c:pt>
-                <c:pt idx="4">
-                  <c:v>106000</c:v>
-                </c:pt>
-                <c:pt idx="5">
-                  <c:v>86100</c:v>
-                </c:pt>
-                <c:pt idx="6">
-                  <c:v>74900</c:v>
-                </c:pt>
-                <c:pt idx="7">
-                  <c:v>80300</c:v>
-                </c:pt>
-                <c:pt idx="8">
-                  <c:v>112700</c:v>
-                </c:pt>
                 <c:pt idx="9">
-                  <c:v>135800</c:v>
+                  <c:v>152100</c:v>
                 </c:pt>
                 <c:pt idx="10">
-                  <c:v>86200</c:v>
+                  <c:v>96500</c:v>
                 </c:pt>
                 <c:pt idx="11">
-                  <c:v>75100</c:v>
+                  <c:v>84200</c:v>
                 </c:pt>
                 <c:pt idx="12">
-                  <c:v>70800</c:v>
+                  <c:v>79300</c:v>
                 </c:pt>
                 <c:pt idx="13">
-                  <c:v>113300</c:v>
+                  <c:v>126900</c:v>
                 </c:pt>
                 <c:pt idx="14">
-                  <c:v>69700</c:v>
+                  <c:v>78100</c:v>
                 </c:pt>
                 <c:pt idx="15">
-                  <c:v>97500</c:v>
+                  <c:v>109100</c:v>
                 </c:pt>
               </c:numCache>
             </c:numRef>
@@ -844,7 +844,7 @@
         <c:axId val="-2100718248"/>
         <c:scaling>
           <c:orientation val="minMax"/>
-          <c:max val="150000.0"/>
+          <c:max val="200000.0"/>
           <c:min val="0.0"/>
         </c:scaling>
         <c:delete val="0"/>
@@ -1014,52 +1014,52 @@
                 <c:formatCode>$#,##0;[Red]($#,##0);"-"</c:formatCode>
                 <c:ptCount val="16"/>
                 <c:pt idx="0">
-                  <c:v>20039</c:v>
+                  <c:v>21764</c:v>
                 </c:pt>
                 <c:pt idx="1">
-                  <c:v>23404</c:v>
+                  <c:v>25374</c:v>
                 </c:pt>
                 <c:pt idx="2">
-                  <c:v>25886</c:v>
+                  <c:v>28056</c:v>
                 </c:pt>
                 <c:pt idx="3">
-                  <c:v>26839</c:v>
+                  <c:v>29044</c:v>
                 </c:pt>
                 <c:pt idx="4">
-                  <c:v>27013</c:v>
+                  <c:v>29290</c:v>
                 </c:pt>
                 <c:pt idx="5">
-                  <c:v>21052</c:v>
+                  <c:v>22765</c:v>
                 </c:pt>
                 <c:pt idx="6">
-                  <c:v>21875</c:v>
+                  <c:v>23665</c:v>
                 </c:pt>
                 <c:pt idx="7">
-                  <c:v>21586</c:v>
+                  <c:v>23449</c:v>
                 </c:pt>
                 <c:pt idx="8">
-                  <c:v>19543</c:v>
+                  <c:v>21245</c:v>
                 </c:pt>
                 <c:pt idx="9">
-                  <c:v>17760</c:v>
+                  <c:v>19288</c:v>
                 </c:pt>
                 <c:pt idx="10">
-                  <c:v>19764</c:v>
+                  <c:v>21418</c:v>
                 </c:pt>
                 <c:pt idx="11">
-                  <c:v>19955</c:v>
+                  <c:v>21677</c:v>
                 </c:pt>
                 <c:pt idx="12">
-                  <c:v>22298</c:v>
+                  <c:v>24166</c:v>
                 </c:pt>
                 <c:pt idx="13">
-                  <c:v>25686</c:v>
+                  <c:v>27966</c:v>
                 </c:pt>
                 <c:pt idx="14">
-                  <c:v>29579</c:v>
+                  <c:v>32083</c:v>
                 </c:pt>
                 <c:pt idx="15">
-                  <c:v>31480</c:v>
+                  <c:v>34106</c:v>
                 </c:pt>
               </c:numCache>
             </c:numRef>
@@ -1633,7 +1633,7 @@
           <a:lstStyle/>
           <a:p>
             <a:r>
-              <a:t>Trades · All. January against January last year: 16.9%; Year to date (Jul to Jan 2026): $1,057,722; Gross margin, year to date: 37.1%. Revenue is $1,057,722 this financial year to date (Jul to Jan 2026). Maintenance contracts make the highest gross margin (59.5%); Installations the lowest (27.0%). The business needs 38.4% gross margin just to cover overheads. Installations: 27.0% gross margin, 8.0 points under the 35.0% target: about $51,576 on $648,400 of revenue this financial year to date. It's below the 38.4% needed to cover overheads, too. Maintenance contracts: 59.5% gross margin, 24.5 points over the 35.0% target ($59,418 ahead on $242,800 this financial year to date).</a:t>
+              <a:t>Trades · All. January against January last year: 16.9%; Year to date (Jul to Jan 2026): $1,178,904; Gross margin, year to date: 43.6%. Revenue is $1,178,904 this financial year to date (Jul to Jan 2026). Maintenance contracts make the highest gross margin (63.8%); Installations the lowest (34.9%). The business needs 44.2% gross margin just to cover overheads. Installations: 34.9% gross margin, 0.1 points under the 35.0% target: about $1,006 on $726,200 of revenue this financial year to date. It's below the 44.2% needed to cover overheads, too. Maintenance contracts: 63.8% gross margin, 28.8 points over the 35.0% target ($78,398 ahead on $272,000 this financial year to date).</a:t>
             </a:r>
           </a:p>
         </p:txBody>
@@ -1703,7 +1703,7 @@
           <a:lstStyle/>
           <a:p>
             <a:r>
-              <a:t>Trades · Maintenance contracts. January against January last year: 45.1%; Year to date (Jul to Jan 2026): $242,800; Gross margin, year to date: 59.5%. Maintenance contracts brought in $242,800 this financial year to date, at a 59.5% gross margin (above the 37.1% overall). Maintenance contracts: 59.5% gross margin, 24.5 points over the 35.0% target ($59,418 ahead on $242,800 this financial year to date).</a:t>
+              <a:t>Trades · Maintenance contracts. January against January last year: 45.0%; Year to date (Jul to Jan 2026): $272,000; Gross margin, year to date: 63.8%. Maintenance contracts brought in $272,000 this financial year to date, at a 63.8% gross margin (above the 43.6% overall). Maintenance contracts: 63.8% gross margin, 28.8 points over the 35.0% target ($78,398 ahead on $272,000 this financial year to date).</a:t>
             </a:r>
           </a:p>
         </p:txBody>
@@ -1773,7 +1773,7 @@
           <a:lstStyle/>
           <a:p>
             <a:r>
-              <a:t>Trades · Installations. January against January last year: 9.1%; Year to date (Jul to Jan 2026): $648,400; Gross margin, year to date: 27.0%. Installations brought in $648,400 this financial year to date, at a 27.0% gross margin (below the 37.1% overall). Installations: 27.0% gross margin, 8.0 points under the 35.0% target: about $51,576 on $648,400 of revenue this financial year to date. It's below the 38.4% needed to cover overheads, too.</a:t>
+              <a:t>Trades · Installations. January against January last year: 9.0%; Year to date (Jul to Jan 2026): $726,200; Gross margin, year to date: 34.9%. Installations brought in $726,200 this financial year to date, at a 34.9% gross margin (below the 43.6% overall). Installations: 34.9% gross margin, 0.1 points under the 35.0% target: about $1,006 on $726,200 of revenue this financial year to date. It's below the 44.2% needed to cover overheads, too.</a:t>
             </a:r>
           </a:p>
         </p:txBody>
@@ -1843,7 +1843,7 @@
           <a:lstStyle/>
           <a:p>
             <a:r>
-              <a:t>Trades · Call-outs and repairs. January against January last year: 17.3%; Year to date (Jul to Jan 2026): $166,522; Gross margin, year to date: 43.7%. Call-outs and repairs brought in $166,522 this financial year to date, at a 43.7% gross margin (above the 37.1% overall). Call-outs and repairs: 43.7% gross margin, 8.7 points over the 35.0% target ($14,429 ahead on $166,522 this financial year to date).</a:t>
+              <a:t>Trades · Call-outs and repairs. January against January last year: 17.4%; Year to date (Jul to Jan 2026): $180,704; Gross margin, year to date: 48.1%. Call-outs and repairs brought in $180,704 this financial year to date, at a 48.1% gross margin (above the 43.6% overall). Call-outs and repairs: 48.1% gross margin, 13.1 points over the 35.0% target ($23,648 ahead on $180,704 this financial year to date).</a:t>
             </a:r>
           </a:p>
         </p:txBody>
@@ -1913,7 +1913,7 @@
           <a:lstStyle/>
           <a:p>
             <a:r>
-              <a:t>By line: financial year to date (Jul to Jan 2026) against the same period last year · Trades. Same period last year: Not available: the data starts October 2024. From gross margin to profit: January's jobs made $58,190 gross margin (35.3%). Technician time not charged to jobs took $4,620 and overheads $58,730, leaving ($5,160) profit before tax ((3.1%) of revenue). To cover overheads, jobs need a 38.4% gross margin on average.</a:t>
+              <a:t>By line: financial year to date (Jul to Jan 2026) against the same period last year · Trades. Same period last year: Not available: the data starts October 2024. From gross margin to profit: January's jobs made $76,716 gross margin (41.9%). Technician time not charged to jobs took $22,372 and overheads $58,730, leaving ($4,386) profit before tax ((2.4%) of revenue). To cover overheads, jobs need a 44.2% gross margin on average.</a:t>
             </a:r>
           </a:p>
         </p:txBody>
@@ -5328,7 +5328,7 @@
                 </a:solidFill>
                 <a:latin typeface="Roboto"/>
               </a:rPr>
-              <a:t>Data retrieved 2pm, Tue 6 Oct 2026 · Generated 8 Oct 2026, 9:35am · Sample data · Made with Python (python-pptx)</a:t>
+              <a:t>Data retrieved 2pm, Tue 6 Oct 2026 · Generated 9 Oct 2026, 8:41am · Sample data · Made with Python (python-pptx)</a:t>
             </a:r>
           </a:p>
         </p:txBody>
@@ -5713,7 +5713,7 @@
                 </a:solidFill>
                 <a:latin typeface="Roboto"/>
               </a:rPr>
-              <a:t>$164,780 against $140,909</a:t>
+              <a:t>$183,306 against $156,794</a:t>
             </a:r>
           </a:p>
         </p:txBody>
@@ -5840,7 +5840,7 @@
                 </a:solidFill>
                 <a:latin typeface="Roboto"/>
               </a:rPr>
-              <a:t>$1,057,722</a:t>
+              <a:t>$1,178,904</a:t>
             </a:r>
           </a:p>
         </p:txBody>
@@ -6006,7 +6006,7 @@
                 </a:solidFill>
                 <a:latin typeface="Roboto"/>
               </a:rPr>
-              <a:t>37.1%</a:t>
+              <a:t>43.6%</a:t>
             </a:r>
           </a:p>
         </p:txBody>
@@ -6045,7 +6045,7 @@
                 </a:solidFill>
                 <a:latin typeface="Roboto"/>
               </a:rPr>
-              <a:t>$392,474 before overheads</a:t>
+              <a:t>$513,656 before overheads</a:t>
             </a:r>
           </a:p>
         </p:txBody>
@@ -6190,7 +6190,7 @@
                 </a:solidFill>
                 <a:latin typeface="Roboto"/>
               </a:rPr>
-              <a:t>Revenue is $1,057,722 this financial year to date (Jul to Jan 2026). Maintenance contracts make the highest gross margin (59.5%); Installations the lowest (27.0%). The business needs 38.4% gross margin just to cover overheads.</a:t>
+              <a:t>Revenue is $1,178,904 this financial year to date (Jul to Jan 2026). Maintenance contracts make the highest gross margin (63.8%); Installations the lowest (34.9%). The business needs 44.2% gross margin just to cover overheads.</a:t>
             </a:r>
           </a:p>
         </p:txBody>
@@ -6317,7 +6317,7 @@
                 </a:solidFill>
                 <a:latin typeface="Roboto"/>
               </a:rPr>
-              <a:t>Installations: 27.0% gross margin, 8.0 points under the 35.0% target: about $51,576 on $648,400 of revenue this financial year to date. It's below the 38.4% needed to cover overheads, too. Maintenance contracts: 59.5% gross margin, 24.5 points over the 35.0% target ($59,418 ahead on $242,800 this financial year to date).</a:t>
+              <a:t>Installations: 34.9% gross margin, 0.1 points under the 35.0% target: about $1,006 on $726,200 of revenue this financial year to date. It's below the 44.2% needed to cover overheads, too. Maintenance contracts: 63.8% gross margin, 28.8 points over the 35.0% target ($78,398 ahead on $272,000 this financial year to date).</a:t>
             </a:r>
           </a:p>
         </p:txBody>
@@ -6395,7 +6395,7 @@
                 </a:solidFill>
                 <a:latin typeface="Roboto"/>
               </a:rPr>
-              <a:t>Data retrieved 2pm, Tue 6 Oct 2026 · Generated 8 Oct 2026, 9:35am · Sample data · Made with Python (python-pptx)</a:t>
+              <a:t>Data retrieved 2pm, Tue 6 Oct 2026 · Generated 9 Oct 2026, 8:41am · Sample data · Made with Python (python-pptx)</a:t>
             </a:r>
           </a:p>
         </p:txBody>
@@ -6741,7 +6741,7 @@
                 </a:solidFill>
                 <a:latin typeface="Roboto"/>
               </a:rPr>
-              <a:t>45.1%</a:t>
+              <a:t>45.0%</a:t>
             </a:r>
           </a:p>
         </p:txBody>
@@ -6780,7 +6780,7 @@
                 </a:solidFill>
                 <a:latin typeface="Roboto"/>
               </a:rPr>
-              <a:t>$35,800 against $24,670</a:t>
+              <a:t>$40,100 against $27,650</a:t>
             </a:r>
           </a:p>
         </p:txBody>
@@ -6907,7 +6907,7 @@
                 </a:solidFill>
                 <a:latin typeface="Roboto"/>
               </a:rPr>
-              <a:t>$242,800</a:t>
+              <a:t>$272,000</a:t>
             </a:r>
           </a:p>
         </p:txBody>
@@ -7073,7 +7073,7 @@
                 </a:solidFill>
                 <a:latin typeface="Roboto"/>
               </a:rPr>
-              <a:t>59.5%</a:t>
+              <a:t>63.8%</a:t>
             </a:r>
           </a:p>
         </p:txBody>
@@ -7112,7 +7112,7 @@
                 </a:solidFill>
                 <a:latin typeface="Roboto"/>
               </a:rPr>
-              <a:t>$144,398 before overheads</a:t>
+              <a:t>$173,598 before overheads</a:t>
             </a:r>
           </a:p>
         </p:txBody>
@@ -7257,7 +7257,7 @@
                 </a:solidFill>
                 <a:latin typeface="Roboto"/>
               </a:rPr>
-              <a:t>Maintenance contracts brought in $242,800 this financial year to date, at a 59.5% gross margin (above the 37.1% overall).</a:t>
+              <a:t>Maintenance contracts brought in $272,000 this financial year to date, at a 63.8% gross margin (above the 43.6% overall).</a:t>
             </a:r>
           </a:p>
         </p:txBody>
@@ -7384,7 +7384,7 @@
                 </a:solidFill>
                 <a:latin typeface="Roboto"/>
               </a:rPr>
-              <a:t>Maintenance contracts: 59.5% gross margin, 24.5 points over the 35.0% target ($59,418 ahead on $242,800 this financial year to date).</a:t>
+              <a:t>Maintenance contracts: 63.8% gross margin, 28.8 points over the 35.0% target ($78,398 ahead on $272,000 this financial year to date).</a:t>
             </a:r>
           </a:p>
         </p:txBody>
@@ -7462,7 +7462,7 @@
                 </a:solidFill>
                 <a:latin typeface="Roboto"/>
               </a:rPr>
-              <a:t>Data retrieved 2pm, Tue 6 Oct 2026 · Generated 8 Oct 2026, 9:35am · Sample data · Made with Python (python-pptx)</a:t>
+              <a:t>Data retrieved 2pm, Tue 6 Oct 2026 · Generated 9 Oct 2026, 8:41am · Sample data · Made with Python (python-pptx)</a:t>
             </a:r>
           </a:p>
         </p:txBody>
@@ -7808,7 +7808,7 @@
                 </a:solidFill>
                 <a:latin typeface="Roboto"/>
               </a:rPr>
-              <a:t>9.1%</a:t>
+              <a:t>9.0%</a:t>
             </a:r>
           </a:p>
         </p:txBody>
@@ -7847,7 +7847,7 @@
                 </a:solidFill>
                 <a:latin typeface="Roboto"/>
               </a:rPr>
-              <a:t>$97,500 against $89,400</a:t>
+              <a:t>$109,100 against $100,100</a:t>
             </a:r>
           </a:p>
         </p:txBody>
@@ -7974,7 +7974,7 @@
                 </a:solidFill>
                 <a:latin typeface="Roboto"/>
               </a:rPr>
-              <a:t>$648,400</a:t>
+              <a:t>$726,200</a:t>
             </a:r>
           </a:p>
         </p:txBody>
@@ -8140,7 +8140,7 @@
                 </a:solidFill>
                 <a:latin typeface="Roboto"/>
               </a:rPr>
-              <a:t>27.0%</a:t>
+              <a:t>34.9%</a:t>
             </a:r>
           </a:p>
         </p:txBody>
@@ -8179,7 +8179,7 @@
                 </a:solidFill>
                 <a:latin typeface="Roboto"/>
               </a:rPr>
-              <a:t>$175,364 before overheads</a:t>
+              <a:t>$253,164 before overheads</a:t>
             </a:r>
           </a:p>
         </p:txBody>
@@ -8324,7 +8324,7 @@
                 </a:solidFill>
                 <a:latin typeface="Roboto"/>
               </a:rPr>
-              <a:t>Installations brought in $648,400 this financial year to date, at a 27.0% gross margin (below the 37.1% overall).</a:t>
+              <a:t>Installations brought in $726,200 this financial year to date, at a 34.9% gross margin (below the 43.6% overall).</a:t>
             </a:r>
           </a:p>
         </p:txBody>
@@ -8451,7 +8451,7 @@
                 </a:solidFill>
                 <a:latin typeface="Roboto"/>
               </a:rPr>
-              <a:t>Installations: 27.0% gross margin, 8.0 points under the 35.0% target: about $51,576 on $648,400 of revenue this financial year to date. It's below the 38.4% needed to cover overheads, too.</a:t>
+              <a:t>Installations: 34.9% gross margin, 0.1 points under the 35.0% target: about $1,006 on $726,200 of revenue this financial year to date. It's below the 44.2% needed to cover overheads, too.</a:t>
             </a:r>
           </a:p>
         </p:txBody>
@@ -8529,7 +8529,7 @@
                 </a:solidFill>
                 <a:latin typeface="Roboto"/>
               </a:rPr>
-              <a:t>Data retrieved 2pm, Tue 6 Oct 2026 · Generated 8 Oct 2026, 9:35am · Sample data · Made with Python (python-pptx)</a:t>
+              <a:t>Data retrieved 2pm, Tue 6 Oct 2026 · Generated 9 Oct 2026, 8:41am · Sample data · Made with Python (python-pptx)</a:t>
             </a:r>
           </a:p>
         </p:txBody>
@@ -8875,7 +8875,7 @@
                 </a:solidFill>
                 <a:latin typeface="Roboto"/>
               </a:rPr>
-              <a:t>17.3%</a:t>
+              <a:t>17.4%</a:t>
             </a:r>
           </a:p>
         </p:txBody>
@@ -8914,7 +8914,7 @@
                 </a:solidFill>
                 <a:latin typeface="Roboto"/>
               </a:rPr>
-              <a:t>$31,480 against $26,839</a:t>
+              <a:t>$34,106 against $29,044</a:t>
             </a:r>
           </a:p>
         </p:txBody>
@@ -9041,7 +9041,7 @@
                 </a:solidFill>
                 <a:latin typeface="Roboto"/>
               </a:rPr>
-              <a:t>$166,522</a:t>
+              <a:t>$180,704</a:t>
             </a:r>
           </a:p>
         </p:txBody>
@@ -9207,7 +9207,7 @@
                 </a:solidFill>
                 <a:latin typeface="Roboto"/>
               </a:rPr>
-              <a:t>43.7%</a:t>
+              <a:t>48.1%</a:t>
             </a:r>
           </a:p>
         </p:txBody>
@@ -9246,7 +9246,7 @@
                 </a:solidFill>
                 <a:latin typeface="Roboto"/>
               </a:rPr>
-              <a:t>$72,712 before overheads</a:t>
+              <a:t>$86,894 before overheads</a:t>
             </a:r>
           </a:p>
         </p:txBody>
@@ -9391,7 +9391,7 @@
                 </a:solidFill>
                 <a:latin typeface="Roboto"/>
               </a:rPr>
-              <a:t>Call-outs and repairs brought in $166,522 this financial year to date, at a 43.7% gross margin (above the 37.1% overall).</a:t>
+              <a:t>Call-outs and repairs brought in $180,704 this financial year to date, at a 48.1% gross margin (above the 43.6% overall).</a:t>
             </a:r>
           </a:p>
         </p:txBody>
@@ -9518,7 +9518,7 @@
                 </a:solidFill>
                 <a:latin typeface="Roboto"/>
               </a:rPr>
-              <a:t>Call-outs and repairs: 43.7% gross margin, 8.7 points over the 35.0% target ($14,429 ahead on $166,522 this financial year to date).</a:t>
+              <a:t>Call-outs and repairs: 48.1% gross margin, 13.1 points over the 35.0% target ($23,648 ahead on $180,704 this financial year to date).</a:t>
             </a:r>
           </a:p>
         </p:txBody>
@@ -9596,7 +9596,7 @@
                 </a:solidFill>
                 <a:latin typeface="Roboto"/>
               </a:rPr>
-              <a:t>Data retrieved 2pm, Tue 6 Oct 2026 · Generated 8 Oct 2026, 9:35am · Sample data · Made with Python (python-pptx)</a:t>
+              <a:t>Data retrieved 2pm, Tue 6 Oct 2026 · Generated 9 Oct 2026, 8:41am · Sample data · Made with Python (python-pptx)</a:t>
             </a:r>
           </a:p>
         </p:txBody>
@@ -9815,7 +9815,7 @@
                 </a:solidFill>
                 <a:latin typeface="Roboto"/>
               </a:rPr>
-              <a:t>Same period last year: Not available: the data starts October 2024. From gross margin to profit: January's jobs made $58,190 gross margin (35.3%). Technician time not charged to jobs took $4,620 and overheads $58,730, leaving ($5,160) profit before tax ((3.1%) of revenue). To cover overheads, jobs need a 38.4% gross margin on average.</a:t>
+              <a:t>Same period last year: Not available: the data starts October 2024. From gross margin to profit: January's jobs made $76,716 gross margin (41.9%). Technician time not charged to jobs took $22,372 and overheads $58,730, leaving ($4,386) profit before tax ((2.4%) of revenue). To cover overheads, jobs need a 44.2% gross margin on average.</a:t>
             </a:r>
           </a:p>
         </p:txBody>
@@ -10046,7 +10046,7 @@
                           </a:solidFill>
                           <a:latin typeface="Roboto"/>
                         </a:rPr>
-                        <a:t>$242,800</a:t>
+                        <a:t>$272,000</a:t>
                       </a:r>
                     </a:p>
                   </a:txBody>
@@ -10127,7 +10127,7 @@
                           </a:solidFill>
                           <a:latin typeface="Roboto"/>
                         </a:rPr>
-                        <a:t>$144,398</a:t>
+                        <a:t>$173,598</a:t>
                       </a:r>
                     </a:p>
                   </a:txBody>
@@ -10154,7 +10154,7 @@
                           </a:solidFill>
                           <a:latin typeface="Roboto"/>
                         </a:rPr>
-                        <a:t>59.5%</a:t>
+                        <a:t>63.8%</a:t>
                       </a:r>
                     </a:p>
                   </a:txBody>
@@ -10210,7 +10210,7 @@
                           </a:solidFill>
                           <a:latin typeface="Roboto"/>
                         </a:rPr>
-                        <a:t>$648,400</a:t>
+                        <a:t>$726,200</a:t>
                       </a:r>
                     </a:p>
                   </a:txBody>
@@ -10291,7 +10291,7 @@
                           </a:solidFill>
                           <a:latin typeface="Roboto"/>
                         </a:rPr>
-                        <a:t>$175,364</a:t>
+                        <a:t>$253,164</a:t>
                       </a:r>
                     </a:p>
                   </a:txBody>
@@ -10318,7 +10318,7 @@
                           </a:solidFill>
                           <a:latin typeface="Roboto"/>
                         </a:rPr>
-                        <a:t>27.0%</a:t>
+                        <a:t>34.9%</a:t>
                       </a:r>
                     </a:p>
                   </a:txBody>
@@ -10374,7 +10374,7 @@
                           </a:solidFill>
                           <a:latin typeface="Roboto"/>
                         </a:rPr>
-                        <a:t>$166,522</a:t>
+                        <a:t>$180,704</a:t>
                       </a:r>
                     </a:p>
                   </a:txBody>
@@ -10455,7 +10455,7 @@
                           </a:solidFill>
                           <a:latin typeface="Roboto"/>
                         </a:rPr>
-                        <a:t>$72,712</a:t>
+                        <a:t>$86,894</a:t>
                       </a:r>
                     </a:p>
                   </a:txBody>
@@ -10482,7 +10482,7 @@
                           </a:solidFill>
                           <a:latin typeface="Roboto"/>
                         </a:rPr>
-                        <a:t>43.7%</a:t>
+                        <a:t>48.1%</a:t>
                       </a:r>
                     </a:p>
                   </a:txBody>
@@ -10538,7 +10538,7 @@
                           </a:solidFill>
                           <a:latin typeface="Roboto"/>
                         </a:rPr>
-                        <a:t>$1,057,722</a:t>
+                        <a:t>$1,178,904</a:t>
                       </a:r>
                     </a:p>
                   </a:txBody>
@@ -10619,7 +10619,7 @@
                           </a:solidFill>
                           <a:latin typeface="Roboto"/>
                         </a:rPr>
-                        <a:t>$392,474</a:t>
+                        <a:t>$513,656</a:t>
                       </a:r>
                     </a:p>
                   </a:txBody>
@@ -10646,7 +10646,7 @@
                           </a:solidFill>
                           <a:latin typeface="Roboto"/>
                         </a:rPr>
-                        <a:t>37.1%</a:t>
+                        <a:t>43.6%</a:t>
                       </a:r>
                     </a:p>
                   </a:txBody>
@@ -10734,7 +10734,7 @@
                 </a:solidFill>
                 <a:latin typeface="Roboto"/>
               </a:rPr>
-              <a:t>Data retrieved 2pm, Tue 6 Oct 2026 · Generated 8 Oct 2026, 9:35am · Sample data · Made with Python (python-pptx)</a:t>
+              <a:t>Data retrieved 2pm, Tue 6 Oct 2026 · Generated 9 Oct 2026, 8:41am · Sample data · Made with Python (python-pptx)</a:t>
             </a:r>
           </a:p>
         </p:txBody>
